--- a/examples/presentation-example (2).pptx
+++ b/examples/presentation-example (2).pptx
@@ -3827,7 +3827,7 @@
         <p:spPr>
           <a:xfrm>
             <a:off x="640080" y="1828800"/>
-            <a:ext cx="5349240" cy="4251960"/>
+            <a:ext cx="5349240" cy="2743200"/>
           </a:xfrm>
           <a:prstGeom prst="roundRect">
             <a:avLst>
@@ -3909,7 +3909,7 @@
         <p:spPr>
           <a:xfrm>
             <a:off x="6263640" y="1828800"/>
-            <a:ext cx="5349240" cy="4251960"/>
+            <a:ext cx="5349240" cy="2743200"/>
           </a:xfrm>
           <a:prstGeom prst="roundRect">
             <a:avLst>
@@ -4937,6 +4937,42 @@
                 <a:latin typeface="Calibri"/>
               </a:rPr>
               <a:t>.</a:t>
+            </a:r>
+          </a:p>
+        </p:txBody>
+      </p:sp>
+      <p:sp>
+        <p:nvSpPr>
+          <p:cNvPr id="10" name="TextBox 9"/>
+          <p:cNvSpPr txBox="1"/>
+          <p:nvPr/>
+        </p:nvSpPr>
+        <p:spPr>
+          <a:xfrm>
+            <a:off x="640080" y="6355080"/>
+            <a:ext cx="5029200" cy="274320"/>
+          </a:xfrm>
+          <a:prstGeom prst="rect">
+            <a:avLst/>
+          </a:prstGeom>
+          <a:noFill/>
+        </p:spPr>
+        <p:txBody>
+          <a:bodyPr wrap="square">
+            <a:spAutoFit/>
+          </a:bodyPr>
+          <a:lstStyle/>
+          <a:p>
+            <a:pPr>
+              <a:defRPr sz="1200">
+                <a:solidFill>
+                  <a:srgbClr val="8C8680"/>
+                </a:solidFill>
+                <a:latin typeface="Calibri"/>
+              </a:defRPr>
+            </a:pPr>
+            <a:r>
+              <a:t>05  /  06</a:t>
             </a:r>
           </a:p>
         </p:txBody>
